--- a/Foundation_F4/Workshop/F4-W05_Apply_Workshop_L09-L10_Open_Evening_Ask_Listen_Then_Email.pptx
+++ b/Foundation_F4/Workshop/F4-W05_Apply_Workshop_L09-L10_Open_Evening_Ask_Listen_Then_Email.pptx
@@ -7435,7 +7435,7 @@
                 <a:latin typeface="Calibri" pitchFamily="34" charset="0"/>
                 <a:cs typeface="Amiri" pitchFamily="2" charset="-78"/>
               </a:rPr>
-              <a:t>Odd numbers come from F4-L09, even numbers from F4-L10. Core: a full sentence from the starter. Develop: add the “more” part. Stretch: link two answers with </a:t>
+              <a:t>Odd numbers come from F4-L09, even numbers from F4-L10. Core: a full sentence from the starter. Develop: add the “more” part. Stretch: link two answers with ‏</a:t>
             </a:r>
             <a:pPr algn="l" indent="0" marL="0">
               <a:buNone/>
@@ -7462,7 +7462,7 @@
                 <a:latin typeface="Calibri" pitchFamily="34" charset="0"/>
                 <a:cs typeface="Amiri" pitchFamily="2" charset="-78"/>
               </a:rPr>
-              <a:t>, </a:t>
+              <a:t>‏, ‏</a:t>
             </a:r>
             <a:pPr algn="l" indent="0" marL="0">
               <a:buNone/>
@@ -7489,7 +7489,7 @@
                 <a:latin typeface="Calibri" pitchFamily="34" charset="0"/>
                 <a:cs typeface="Amiri" pitchFamily="2" charset="-78"/>
               </a:rPr>
-              <a:t> or </a:t>
+              <a:t>‏ or ‏</a:t>
             </a:r>
             <a:pPr algn="l" indent="0" marL="0">
               <a:buNone/>
@@ -7516,7 +7516,7 @@
                 <a:latin typeface="Calibri" pitchFamily="34" charset="0"/>
                 <a:cs typeface="Amiri" pitchFamily="2" charset="-78"/>
               </a:rPr>
-              <a:t>. Swap after each question.</a:t>
+              <a:t>‏. Swap after each question.</a:t>
             </a:r>
             <a:endParaRPr lang="en-US" sz="1100" dirty="0"/>
           </a:p>
@@ -10842,7 +10842,7 @@
                 <a:latin typeface="Calibri" pitchFamily="34" charset="0"/>
                 <a:cs typeface="Amiri" pitchFamily="2" charset="-78"/>
               </a:rPr>
-              <a:t>Add the place and number: </a:t>
+              <a:t>Add the place and number: ‏</a:t>
             </a:r>
             <a:pPr algn="l" indent="0" marL="0">
               <a:buNone/>
@@ -10896,7 +10896,7 @@
                 <a:latin typeface="Calibri" pitchFamily="34" charset="0"/>
                 <a:cs typeface="Amiri" pitchFamily="2" charset="-78"/>
               </a:rPr>
-              <a:t>.</a:t>
+              <a:t>‏.</a:t>
             </a:r>
             <a:endParaRPr lang="en-US" sz="1150" dirty="0"/>
           </a:p>
@@ -11033,7 +11033,7 @@
                 <a:latin typeface="Calibri" pitchFamily="34" charset="0"/>
                 <a:cs typeface="Amiri" pitchFamily="2" charset="-78"/>
               </a:rPr>
-              <a:t>Add your opinion with </a:t>
+              <a:t>Add your opinion with ‏</a:t>
             </a:r>
             <a:pPr algn="l" indent="0" marL="0">
               <a:buNone/>
@@ -11060,7 +11060,7 @@
                 <a:latin typeface="Calibri" pitchFamily="34" charset="0"/>
                 <a:cs typeface="Amiri" pitchFamily="2" charset="-78"/>
               </a:rPr>
-              <a:t> and </a:t>
+              <a:t>‏ and ‏</a:t>
             </a:r>
             <a:pPr algn="l" indent="0" marL="0">
               <a:buNone/>
@@ -11087,7 +11087,7 @@
                 <a:latin typeface="Calibri" pitchFamily="34" charset="0"/>
                 <a:cs typeface="Amiri" pitchFamily="2" charset="-78"/>
               </a:rPr>
-              <a:t>.</a:t>
+              <a:t>‏.</a:t>
             </a:r>
             <a:endParaRPr lang="en-US" sz="1150" dirty="0"/>
           </a:p>
@@ -17714,7 +17714,7 @@
                 <a:latin typeface="Calibri" pitchFamily="34" charset="0"/>
                 <a:cs typeface="Amiri" pitchFamily="2" charset="-78"/>
               </a:rPr>
-              <a:t>To a woman: </a:t>
+              <a:t>To a woman: ‏</a:t>
             </a:r>
             <a:pPr algn="l" indent="0" marL="0">
               <a:buNone/>
@@ -17741,7 +17741,7 @@
                 <a:latin typeface="Calibri" pitchFamily="34" charset="0"/>
                 <a:cs typeface="Amiri" pitchFamily="2" charset="-78"/>
               </a:rPr>
-              <a:t>.</a:t>
+              <a:t>‏.</a:t>
             </a:r>
             <a:endParaRPr lang="en-US" sz="1150" dirty="0"/>
           </a:p>
@@ -17952,7 +17952,7 @@
                 <a:latin typeface="Calibri" pitchFamily="34" charset="0"/>
                 <a:cs typeface="Amiri" pitchFamily="2" charset="-78"/>
               </a:rPr>
-              <a:t>Feminine → </a:t>
+              <a:t>Feminine → ‏</a:t>
             </a:r>
             <a:pPr algn="l" indent="0" marL="0">
               <a:buNone/>
@@ -17979,7 +17979,7 @@
                 <a:latin typeface="Calibri" pitchFamily="34" charset="0"/>
                 <a:cs typeface="Amiri" pitchFamily="2" charset="-78"/>
               </a:rPr>
-              <a:t>.</a:t>
+              <a:t>‏.</a:t>
             </a:r>
             <a:endParaRPr lang="en-US" sz="1150" dirty="0"/>
           </a:p>
@@ -20179,7 +20179,7 @@
                 <a:latin typeface="Calibri" pitchFamily="34" charset="0"/>
                 <a:cs typeface="Amiri" pitchFamily="2" charset="-78"/>
               </a:rPr>
-              <a:t>☐  At least one </a:t>
+              <a:t>☐  At least one ‏</a:t>
             </a:r>
             <a:pPr algn="l" indent="0" marL="0">
               <a:buNone/>
@@ -20206,7 +20206,7 @@
                 <a:latin typeface="Calibri" pitchFamily="34" charset="0"/>
                 <a:cs typeface="Amiri" pitchFamily="2" charset="-78"/>
               </a:rPr>
-              <a:t> and one </a:t>
+              <a:t>‏ and one ‏</a:t>
             </a:r>
             <a:pPr algn="l" indent="0" marL="0">
               <a:buNone/>
@@ -20233,7 +20233,7 @@
                 <a:latin typeface="Calibri" pitchFamily="34" charset="0"/>
                 <a:cs typeface="Amiri" pitchFamily="2" charset="-78"/>
               </a:rPr>
-              <a:t> (Develop).</a:t>
+              <a:t>‏ (Develop).</a:t>
             </a:r>
             <a:endParaRPr lang="en-US" sz="1200" dirty="0"/>
           </a:p>
@@ -23940,7 +23940,7 @@
                 <a:latin typeface="Calibri" pitchFamily="34" charset="0"/>
                 <a:cs typeface="Amiri" pitchFamily="2" charset="-78"/>
               </a:rPr>
-              <a:t>use linking words (</a:t>
+              <a:t>use linking words (‏</a:t>
             </a:r>
             <a:pPr algn="l" indent="0" marL="0">
               <a:buNone/>
@@ -24048,7 +24048,7 @@
                 <a:latin typeface="Calibri" pitchFamily="34" charset="0"/>
                 <a:cs typeface="Amiri" pitchFamily="2" charset="-78"/>
               </a:rPr>
-              <a:t>)?</a:t>
+              <a:t>‏)?</a:t>
             </a:r>
             <a:endParaRPr lang="en-US" sz="1100" dirty="0"/>
           </a:p>
@@ -28077,7 +28077,7 @@
                 <a:latin typeface="Calibri" pitchFamily="34" charset="0"/>
                 <a:cs typeface="Amiri" pitchFamily="2" charset="-78"/>
               </a:rPr>
-              <a:t>I added reasons (</a:t>
+              <a:t>I added reasons (‏</a:t>
             </a:r>
             <a:pPr algn="l" indent="0" marL="0">
               <a:buNone/>
@@ -28104,7 +28104,7 @@
                 <a:latin typeface="Calibri" pitchFamily="34" charset="0"/>
                 <a:cs typeface="Amiri" pitchFamily="2" charset="-78"/>
               </a:rPr>
-              <a:t>) and extra details without frames.</a:t>
+              <a:t>‏) and extra details without frames.</a:t>
             </a:r>
             <a:endParaRPr lang="en-US" sz="1300" dirty="0"/>
           </a:p>
@@ -32232,7 +32232,7 @@
                 <a:latin typeface="Calibri" pitchFamily="34" charset="0"/>
                 <a:cs typeface="Amiri" pitchFamily="2" charset="-78"/>
               </a:rPr>
-              <a:t>☐  Add a reason (</a:t>
+              <a:t>☐  Add a reason (‏</a:t>
             </a:r>
             <a:pPr algn="l" indent="0" marL="0">
               <a:buNone/>
@@ -32259,7 +32259,7 @@
                 <a:latin typeface="Calibri" pitchFamily="34" charset="0"/>
                 <a:cs typeface="Amiri" pitchFamily="2" charset="-78"/>
               </a:rPr>
-              <a:t>) and an extra detail to every point.</a:t>
+              <a:t>‏) and an extra detail to every point.</a:t>
             </a:r>
             <a:endParaRPr lang="en-US" sz="1300" dirty="0"/>
           </a:p>
@@ -33780,7 +33780,7 @@
                 <a:latin typeface="Calibri" pitchFamily="34" charset="0"/>
                 <a:cs typeface="Amiri" pitchFamily="2" charset="-78"/>
               </a:rPr>
-              <a:t>Join a word from each lesson in one sentence with </a:t>
+              <a:t>Join a word from each lesson in one sentence with ‏</a:t>
             </a:r>
             <a:pPr algn="l" indent="0" marL="0">
               <a:buNone/>
@@ -33807,7 +33807,7 @@
                 <a:latin typeface="Calibri" pitchFamily="34" charset="0"/>
                 <a:cs typeface="Amiri" pitchFamily="2" charset="-78"/>
               </a:rPr>
-              <a:t> or </a:t>
+              <a:t>‏ or ‏</a:t>
             </a:r>
             <a:pPr algn="l" indent="0" marL="0">
               <a:buNone/>
@@ -33834,7 +33834,7 @@
                 <a:latin typeface="Calibri" pitchFamily="34" charset="0"/>
                 <a:cs typeface="Amiri" pitchFamily="2" charset="-78"/>
               </a:rPr>
-              <a:t>.</a:t>
+              <a:t>‏.</a:t>
             </a:r>
             <a:endParaRPr lang="en-US" sz="1150" dirty="0"/>
           </a:p>
